--- a/protected-downloads/praesentation/VA00.pptx
+++ b/protected-downloads/praesentation/VA00.pptx
@@ -797,7 +797,7 @@
           <a:lstStyle/>
           <a:p>
             <a:r>
-              <a:t>Zuordnungslogik: agree = Kernsystem für Kundendaten, VR-NetWorld = Kunde bedient selbst. Bankgeheimnis/DSGVO als Grundregel ab Tag 1 verankern.</a:t>
+              <a:t>Zuordnungslogik: agree = Kernsystem für Kundendaten, BankingManager = Kunde bedient selbst. Bankgeheimnis/DSGVO als Grundregel ab Tag 1 verankern.</a:t>
             </a:r>
           </a:p>
         </p:txBody>
@@ -942,7 +942,7 @@
           </a:p>
           <a:p>
             <a:r>
-              <a:t>Kernpunkte: Votum = immer Marktfolge; agree = Kernsystem für Kundendaten; VR-NetWorld = Kundenportal, kein Innendienst-Zugang.</a:t>
+              <a:t>Kernpunkte: Votum = immer Marktfolge; agree = Kernsystem für Kundendaten; BankingManager = Kundenportal, kein Innendienst-Zugang.</a:t>
             </a:r>
           </a:p>
           <a:p>
@@ -5602,7 +5602,7 @@
                 </a:solidFill>
                 <a:latin typeface="Arial"/>
               </a:rPr>
-              <a:t>▸  M365 für Office/Kommunikation; VR-NetWorld ist das Kundenportal – kein Innendienst-Zugang.</a:t>
+              <a:t>▸  M365 für Office/Kommunikation; BankingManager ist das Kundenportal – kein Innendienst-Zugang.</a:t>
             </a:r>
           </a:p>
           <a:p>
@@ -8131,7 +8131,7 @@
                 </a:solidFill>
                 <a:latin typeface="Arial"/>
               </a:rPr>
-              <a:t>▸  Typische Innendienst-Aufgaben dem zuständigen System (agree, DMS, Microsoft 365, VR-NetWorld) und der richtigen Stelle zuordnen</a:t>
+              <a:t>▸  Typische Innendienst-Aufgaben dem zuständigen System (agree, DMS, Microsoft 365, BankingManager) und der richtigen Stelle zuordnen</a:t>
             </a:r>
           </a:p>
           <a:p>

--- a/protected-downloads/praesentation/VA00.pptx
+++ b/protected-downloads/praesentation/VA00.pptx
@@ -942,7 +942,7 @@
           </a:p>
           <a:p>
             <a:r>
-              <a:t>Kernpunkte: Votum = immer Marktfolge; agree = Kernsystem für Kundendaten; BankingManager = Kundenportal, kein Innendienst-Zugang.</a:t>
+              <a:t>Kernpunkte: Votum = immer Marktfolge; agree = Kernsystem für Kundendaten; BankingManager = Banking-Software (Kunde bedient selbst), kein Innendienst-Zugang.</a:t>
             </a:r>
           </a:p>
           <a:p>
@@ -5602,7 +5602,7 @@
                 </a:solidFill>
                 <a:latin typeface="Arial"/>
               </a:rPr>
-              <a:t>▸  M365 für Office/Kommunikation; BankingManager ist das Kundenportal – kein Innendienst-Zugang.</a:t>
+              <a:t>▸  M365 für Office/Kommunikation; BankingManager ist die Banking-Software, die der Firmenkunde selbst bedient – kein Innendienst-Zugang.</a:t>
             </a:r>
           </a:p>
           <a:p>

--- a/protected-downloads/praesentation/VA00.pptx
+++ b/protected-downloads/praesentation/VA00.pptx
@@ -4532,7 +4532,7 @@
                 </a:solidFill>
                 <a:latin typeface="Arial"/>
               </a:rPr>
-              <a:t>v0.1</a:t>
+              <a:t>v1.0</a:t>
             </a:r>
           </a:p>
         </p:txBody>
